--- a/Presentation/Floodcast Venice - Water you thinking 💦.pptx
+++ b/Presentation/Floodcast Venice - Water you thinking 💦.pptx
@@ -4172,7 +4172,7 @@
                 <a:latin typeface="Arial" panose="020B0604020202020204" pitchFamily="34" charset="0"/>
                 <a:cs typeface="Arial" panose="020B0604020202020204" pitchFamily="34" charset="0"/>
               </a:rPr>
-              <a:t>Users set a critical flooding threshold and instantly see when each scenario crosses it, no data pipeline, no modelling expertise required</a:t>
+              <a:t>No data pipeline, no modelling expertise required</a:t>
             </a:r>
           </a:p>
           <a:p>
@@ -4364,8 +4364,8 @@
         </p:nvSpPr>
         <p:spPr>
           <a:xfrm>
-            <a:off x="458002" y="3982064"/>
-            <a:ext cx="2673285" cy="2031325"/>
+            <a:off x="458002" y="4693636"/>
+            <a:ext cx="2673285" cy="1754326"/>
           </a:xfrm>
           <a:prstGeom prst="rect">
             <a:avLst/>
@@ -4377,12 +4377,6 @@
             <a:spAutoFit/>
           </a:bodyPr>
           <a:lstStyle/>
-          <a:p>
-            <a:r>
-              <a:rPr lang="en-US" dirty="0"/>
-              <a:t>Why?</a:t>
-            </a:r>
-          </a:p>
           <a:p>
             <a:endParaRPr lang="en-US" dirty="0"/>
           </a:p>
@@ -4424,6 +4418,42 @@
           </a:prstGeom>
         </p:spPr>
       </p:pic>
+      <p:sp>
+        <p:nvSpPr>
+          <p:cNvPr id="4" name="TextBox 3">
+            <a:extLst>
+              <a:ext uri="{FF2B5EF4-FFF2-40B4-BE49-F238E27FC236}">
+                <a16:creationId xmlns:a16="http://schemas.microsoft.com/office/drawing/2014/main" id="{6E7692FA-740C-B127-D710-D02154B5F01D}"/>
+              </a:ext>
+            </a:extLst>
+          </p:cNvPr>
+          <p:cNvSpPr txBox="1"/>
+          <p:nvPr/>
+        </p:nvSpPr>
+        <p:spPr>
+          <a:xfrm>
+            <a:off x="458002" y="4490199"/>
+            <a:ext cx="2599830" cy="369332"/>
+          </a:xfrm>
+          <a:prstGeom prst="rect">
+            <a:avLst/>
+          </a:prstGeom>
+          <a:noFill/>
+        </p:spPr>
+        <p:txBody>
+          <a:bodyPr wrap="square" rtlCol="0">
+            <a:spAutoFit/>
+          </a:bodyPr>
+          <a:lstStyle/>
+          <a:p>
+            <a:r>
+              <a:rPr lang="en-GB" dirty="0"/>
+              <a:t>Why Linear regression?</a:t>
+            </a:r>
+            <a:endParaRPr lang="en-AE" dirty="0"/>
+          </a:p>
+        </p:txBody>
+      </p:sp>
     </p:spTree>
   </p:cSld>
   <p:clrMapOvr>
@@ -4441,6 +4471,458 @@
       </p:transition>
     </mc:Fallback>
   </mc:AlternateContent>
+  <p:timing>
+    <p:tnLst>
+      <p:par>
+        <p:cTn id="1" dur="indefinite" restart="never" nodeType="tmRoot">
+          <p:childTnLst>
+            <p:seq concurrent="1" nextAc="seek">
+              <p:cTn id="2" dur="indefinite" nodeType="mainSeq">
+                <p:childTnLst>
+                  <p:par>
+                    <p:cTn id="3" fill="hold">
+                      <p:stCondLst>
+                        <p:cond delay="indefinite"/>
+                      </p:stCondLst>
+                      <p:childTnLst>
+                        <p:par>
+                          <p:cTn id="4" fill="hold">
+                            <p:stCondLst>
+                              <p:cond delay="0"/>
+                            </p:stCondLst>
+                            <p:childTnLst>
+                              <p:par>
+                                <p:cTn id="5" presetID="26" presetClass="entr" presetSubtype="0" fill="hold" grpId="0" nodeType="clickEffect">
+                                  <p:stCondLst>
+                                    <p:cond delay="0"/>
+                                  </p:stCondLst>
+                                  <p:childTnLst>
+                                    <p:set>
+                                      <p:cBhvr>
+                                        <p:cTn id="6" dur="1" fill="hold">
+                                          <p:stCondLst>
+                                            <p:cond delay="0"/>
+                                          </p:stCondLst>
+                                        </p:cTn>
+                                        <p:tgtEl>
+                                          <p:spTgt spid="4"/>
+                                        </p:tgtEl>
+                                        <p:attrNameLst>
+                                          <p:attrName>style.visibility</p:attrName>
+                                        </p:attrNameLst>
+                                      </p:cBhvr>
+                                      <p:to>
+                                        <p:strVal val="visible"/>
+                                      </p:to>
+                                    </p:set>
+                                    <p:animEffect transition="in" filter="wipe(down)">
+                                      <p:cBhvr>
+                                        <p:cTn id="7" dur="580">
+                                          <p:stCondLst>
+                                            <p:cond delay="0"/>
+                                          </p:stCondLst>
+                                        </p:cTn>
+                                        <p:tgtEl>
+                                          <p:spTgt spid="4"/>
+                                        </p:tgtEl>
+                                      </p:cBhvr>
+                                    </p:animEffect>
+                                    <p:anim calcmode="lin" valueType="num">
+                                      <p:cBhvr>
+                                        <p:cTn id="8" dur="1822" tmFilter="0,0; 0.14,0.36; 0.43,0.73; 0.71,0.91; 1.0,1.0">
+                                          <p:stCondLst>
+                                            <p:cond delay="0"/>
+                                          </p:stCondLst>
+                                        </p:cTn>
+                                        <p:tgtEl>
+                                          <p:spTgt spid="4"/>
+                                        </p:tgtEl>
+                                        <p:attrNameLst>
+                                          <p:attrName>ppt_x</p:attrName>
+                                        </p:attrNameLst>
+                                      </p:cBhvr>
+                                      <p:tavLst>
+                                        <p:tav tm="0">
+                                          <p:val>
+                                            <p:strVal val="#ppt_x-0.25"/>
+                                          </p:val>
+                                        </p:tav>
+                                        <p:tav tm="100000">
+                                          <p:val>
+                                            <p:strVal val="#ppt_x"/>
+                                          </p:val>
+                                        </p:tav>
+                                      </p:tavLst>
+                                    </p:anim>
+                                    <p:anim calcmode="lin" valueType="num">
+                                      <p:cBhvr>
+                                        <p:cTn id="9" dur="664" tmFilter="0.0,0.0; 0.25,0.07; 0.50,0.2; 0.75,0.467; 1.0,1.0">
+                                          <p:stCondLst>
+                                            <p:cond delay="0"/>
+                                          </p:stCondLst>
+                                        </p:cTn>
+                                        <p:tgtEl>
+                                          <p:spTgt spid="4"/>
+                                        </p:tgtEl>
+                                        <p:attrNameLst>
+                                          <p:attrName>ppt_y</p:attrName>
+                                        </p:attrNameLst>
+                                      </p:cBhvr>
+                                      <p:tavLst>
+                                        <p:tav tm="0" fmla="#ppt_y-sin(pi*$)/3">
+                                          <p:val>
+                                            <p:fltVal val="0.5"/>
+                                          </p:val>
+                                        </p:tav>
+                                        <p:tav tm="100000">
+                                          <p:val>
+                                            <p:fltVal val="1"/>
+                                          </p:val>
+                                        </p:tav>
+                                      </p:tavLst>
+                                    </p:anim>
+                                    <p:anim calcmode="lin" valueType="num">
+                                      <p:cBhvr>
+                                        <p:cTn id="10" dur="664" tmFilter="0, 0; 0.125,0.2665; 0.25,0.4; 0.375,0.465; 0.5,0.5;  0.625,0.535; 0.75,0.6; 0.875,0.7335; 1,1">
+                                          <p:stCondLst>
+                                            <p:cond delay="664"/>
+                                          </p:stCondLst>
+                                        </p:cTn>
+                                        <p:tgtEl>
+                                          <p:spTgt spid="4"/>
+                                        </p:tgtEl>
+                                        <p:attrNameLst>
+                                          <p:attrName>ppt_y</p:attrName>
+                                        </p:attrNameLst>
+                                      </p:cBhvr>
+                                      <p:tavLst>
+                                        <p:tav tm="0" fmla="#ppt_y-sin(pi*$)/9">
+                                          <p:val>
+                                            <p:fltVal val="0"/>
+                                          </p:val>
+                                        </p:tav>
+                                        <p:tav tm="100000">
+                                          <p:val>
+                                            <p:fltVal val="1"/>
+                                          </p:val>
+                                        </p:tav>
+                                      </p:tavLst>
+                                    </p:anim>
+                                    <p:anim calcmode="lin" valueType="num">
+                                      <p:cBhvr>
+                                        <p:cTn id="11" dur="332" tmFilter="0, 0; 0.125,0.2665; 0.25,0.4; 0.375,0.465; 0.5,0.5;  0.625,0.535; 0.75,0.6; 0.875,0.7335; 1,1">
+                                          <p:stCondLst>
+                                            <p:cond delay="1324"/>
+                                          </p:stCondLst>
+                                        </p:cTn>
+                                        <p:tgtEl>
+                                          <p:spTgt spid="4"/>
+                                        </p:tgtEl>
+                                        <p:attrNameLst>
+                                          <p:attrName>ppt_y</p:attrName>
+                                        </p:attrNameLst>
+                                      </p:cBhvr>
+                                      <p:tavLst>
+                                        <p:tav tm="0" fmla="#ppt_y-sin(pi*$)/27">
+                                          <p:val>
+                                            <p:fltVal val="0"/>
+                                          </p:val>
+                                        </p:tav>
+                                        <p:tav tm="100000">
+                                          <p:val>
+                                            <p:fltVal val="1"/>
+                                          </p:val>
+                                        </p:tav>
+                                      </p:tavLst>
+                                    </p:anim>
+                                    <p:anim calcmode="lin" valueType="num">
+                                      <p:cBhvr>
+                                        <p:cTn id="12" dur="164" tmFilter="0, 0; 0.125,0.2665; 0.25,0.4; 0.375,0.465; 0.5,0.5;  0.625,0.535; 0.75,0.6; 0.875,0.7335; 1,1">
+                                          <p:stCondLst>
+                                            <p:cond delay="1656"/>
+                                          </p:stCondLst>
+                                        </p:cTn>
+                                        <p:tgtEl>
+                                          <p:spTgt spid="4"/>
+                                        </p:tgtEl>
+                                        <p:attrNameLst>
+                                          <p:attrName>ppt_y</p:attrName>
+                                        </p:attrNameLst>
+                                      </p:cBhvr>
+                                      <p:tavLst>
+                                        <p:tav tm="0" fmla="#ppt_y-sin(pi*$)/81">
+                                          <p:val>
+                                            <p:fltVal val="0"/>
+                                          </p:val>
+                                        </p:tav>
+                                        <p:tav tm="100000">
+                                          <p:val>
+                                            <p:fltVal val="1"/>
+                                          </p:val>
+                                        </p:tav>
+                                      </p:tavLst>
+                                    </p:anim>
+                                    <p:animScale>
+                                      <p:cBhvr>
+                                        <p:cTn id="13" dur="26">
+                                          <p:stCondLst>
+                                            <p:cond delay="650"/>
+                                          </p:stCondLst>
+                                        </p:cTn>
+                                        <p:tgtEl>
+                                          <p:spTgt spid="4"/>
+                                        </p:tgtEl>
+                                      </p:cBhvr>
+                                      <p:to x="100000" y="60000"/>
+                                    </p:animScale>
+                                    <p:animScale>
+                                      <p:cBhvr>
+                                        <p:cTn id="14" dur="166" decel="50000">
+                                          <p:stCondLst>
+                                            <p:cond delay="676"/>
+                                          </p:stCondLst>
+                                        </p:cTn>
+                                        <p:tgtEl>
+                                          <p:spTgt spid="4"/>
+                                        </p:tgtEl>
+                                      </p:cBhvr>
+                                      <p:to x="100000" y="100000"/>
+                                    </p:animScale>
+                                    <p:animScale>
+                                      <p:cBhvr>
+                                        <p:cTn id="15" dur="26">
+                                          <p:stCondLst>
+                                            <p:cond delay="1312"/>
+                                          </p:stCondLst>
+                                        </p:cTn>
+                                        <p:tgtEl>
+                                          <p:spTgt spid="4"/>
+                                        </p:tgtEl>
+                                      </p:cBhvr>
+                                      <p:to x="100000" y="80000"/>
+                                    </p:animScale>
+                                    <p:animScale>
+                                      <p:cBhvr>
+                                        <p:cTn id="16" dur="166" decel="50000">
+                                          <p:stCondLst>
+                                            <p:cond delay="1338"/>
+                                          </p:stCondLst>
+                                        </p:cTn>
+                                        <p:tgtEl>
+                                          <p:spTgt spid="4"/>
+                                        </p:tgtEl>
+                                      </p:cBhvr>
+                                      <p:to x="100000" y="100000"/>
+                                    </p:animScale>
+                                    <p:animScale>
+                                      <p:cBhvr>
+                                        <p:cTn id="17" dur="26">
+                                          <p:stCondLst>
+                                            <p:cond delay="1642"/>
+                                          </p:stCondLst>
+                                        </p:cTn>
+                                        <p:tgtEl>
+                                          <p:spTgt spid="4"/>
+                                        </p:tgtEl>
+                                      </p:cBhvr>
+                                      <p:to x="100000" y="90000"/>
+                                    </p:animScale>
+                                    <p:animScale>
+                                      <p:cBhvr>
+                                        <p:cTn id="18" dur="166" decel="50000">
+                                          <p:stCondLst>
+                                            <p:cond delay="1668"/>
+                                          </p:stCondLst>
+                                        </p:cTn>
+                                        <p:tgtEl>
+                                          <p:spTgt spid="4"/>
+                                        </p:tgtEl>
+                                      </p:cBhvr>
+                                      <p:to x="100000" y="100000"/>
+                                    </p:animScale>
+                                    <p:animScale>
+                                      <p:cBhvr>
+                                        <p:cTn id="19" dur="26">
+                                          <p:stCondLst>
+                                            <p:cond delay="1808"/>
+                                          </p:stCondLst>
+                                        </p:cTn>
+                                        <p:tgtEl>
+                                          <p:spTgt spid="4"/>
+                                        </p:tgtEl>
+                                      </p:cBhvr>
+                                      <p:to x="100000" y="95000"/>
+                                    </p:animScale>
+                                    <p:animScale>
+                                      <p:cBhvr>
+                                        <p:cTn id="20" dur="166" decel="50000">
+                                          <p:stCondLst>
+                                            <p:cond delay="1834"/>
+                                          </p:stCondLst>
+                                        </p:cTn>
+                                        <p:tgtEl>
+                                          <p:spTgt spid="4"/>
+                                        </p:tgtEl>
+                                      </p:cBhvr>
+                                      <p:to x="100000" y="100000"/>
+                                    </p:animScale>
+                                  </p:childTnLst>
+                                </p:cTn>
+                              </p:par>
+                            </p:childTnLst>
+                          </p:cTn>
+                        </p:par>
+                      </p:childTnLst>
+                    </p:cTn>
+                  </p:par>
+                  <p:par>
+                    <p:cTn id="21" fill="hold">
+                      <p:stCondLst>
+                        <p:cond delay="indefinite"/>
+                      </p:stCondLst>
+                      <p:childTnLst>
+                        <p:par>
+                          <p:cTn id="22" fill="hold">
+                            <p:stCondLst>
+                              <p:cond delay="0"/>
+                            </p:stCondLst>
+                            <p:childTnLst>
+                              <p:par>
+                                <p:cTn id="23" presetID="31" presetClass="entr" presetSubtype="0" fill="hold" grpId="0" nodeType="clickEffect">
+                                  <p:stCondLst>
+                                    <p:cond delay="0"/>
+                                  </p:stCondLst>
+                                  <p:childTnLst>
+                                    <p:set>
+                                      <p:cBhvr>
+                                        <p:cTn id="24" dur="1" fill="hold">
+                                          <p:stCondLst>
+                                            <p:cond delay="0"/>
+                                          </p:stCondLst>
+                                        </p:cTn>
+                                        <p:tgtEl>
+                                          <p:spTgt spid="8"/>
+                                        </p:tgtEl>
+                                        <p:attrNameLst>
+                                          <p:attrName>style.visibility</p:attrName>
+                                        </p:attrNameLst>
+                                      </p:cBhvr>
+                                      <p:to>
+                                        <p:strVal val="visible"/>
+                                      </p:to>
+                                    </p:set>
+                                    <p:anim calcmode="lin" valueType="num">
+                                      <p:cBhvr>
+                                        <p:cTn id="25" dur="1000" fill="hold"/>
+                                        <p:tgtEl>
+                                          <p:spTgt spid="8"/>
+                                        </p:tgtEl>
+                                        <p:attrNameLst>
+                                          <p:attrName>ppt_w</p:attrName>
+                                        </p:attrNameLst>
+                                      </p:cBhvr>
+                                      <p:tavLst>
+                                        <p:tav tm="0">
+                                          <p:val>
+                                            <p:fltVal val="0"/>
+                                          </p:val>
+                                        </p:tav>
+                                        <p:tav tm="100000">
+                                          <p:val>
+                                            <p:strVal val="#ppt_w"/>
+                                          </p:val>
+                                        </p:tav>
+                                      </p:tavLst>
+                                    </p:anim>
+                                    <p:anim calcmode="lin" valueType="num">
+                                      <p:cBhvr>
+                                        <p:cTn id="26" dur="1000" fill="hold"/>
+                                        <p:tgtEl>
+                                          <p:spTgt spid="8"/>
+                                        </p:tgtEl>
+                                        <p:attrNameLst>
+                                          <p:attrName>ppt_h</p:attrName>
+                                        </p:attrNameLst>
+                                      </p:cBhvr>
+                                      <p:tavLst>
+                                        <p:tav tm="0">
+                                          <p:val>
+                                            <p:fltVal val="0"/>
+                                          </p:val>
+                                        </p:tav>
+                                        <p:tav tm="100000">
+                                          <p:val>
+                                            <p:strVal val="#ppt_h"/>
+                                          </p:val>
+                                        </p:tav>
+                                      </p:tavLst>
+                                    </p:anim>
+                                    <p:anim calcmode="lin" valueType="num">
+                                      <p:cBhvr>
+                                        <p:cTn id="27" dur="1000" fill="hold"/>
+                                        <p:tgtEl>
+                                          <p:spTgt spid="8"/>
+                                        </p:tgtEl>
+                                        <p:attrNameLst>
+                                          <p:attrName>style.rotation</p:attrName>
+                                        </p:attrNameLst>
+                                      </p:cBhvr>
+                                      <p:tavLst>
+                                        <p:tav tm="0">
+                                          <p:val>
+                                            <p:fltVal val="90"/>
+                                          </p:val>
+                                        </p:tav>
+                                        <p:tav tm="100000">
+                                          <p:val>
+                                            <p:fltVal val="0"/>
+                                          </p:val>
+                                        </p:tav>
+                                      </p:tavLst>
+                                    </p:anim>
+                                    <p:animEffect transition="in" filter="fade">
+                                      <p:cBhvr>
+                                        <p:cTn id="28" dur="1000"/>
+                                        <p:tgtEl>
+                                          <p:spTgt spid="8"/>
+                                        </p:tgtEl>
+                                      </p:cBhvr>
+                                    </p:animEffect>
+                                  </p:childTnLst>
+                                </p:cTn>
+                              </p:par>
+                            </p:childTnLst>
+                          </p:cTn>
+                        </p:par>
+                      </p:childTnLst>
+                    </p:cTn>
+                  </p:par>
+                </p:childTnLst>
+              </p:cTn>
+              <p:prevCondLst>
+                <p:cond evt="onPrev" delay="0">
+                  <p:tgtEl>
+                    <p:sldTgt/>
+                  </p:tgtEl>
+                </p:cond>
+              </p:prevCondLst>
+              <p:nextCondLst>
+                <p:cond evt="onNext" delay="0">
+                  <p:tgtEl>
+                    <p:sldTgt/>
+                  </p:tgtEl>
+                </p:cond>
+              </p:nextCondLst>
+            </p:seq>
+          </p:childTnLst>
+        </p:cTn>
+      </p:par>
+    </p:tnLst>
+    <p:bldLst>
+      <p:bldP spid="8" grpId="0"/>
+      <p:bldP spid="4" grpId="0"/>
+    </p:bldLst>
+  </p:timing>
 </p:sld>
 </file>
 
@@ -4901,7 +5383,7 @@
         </p:nvSpPr>
         <p:spPr>
           <a:xfrm>
-            <a:off x="429835" y="5712169"/>
+            <a:off x="316567" y="5917370"/>
             <a:ext cx="8141109" cy="738664"/>
           </a:xfrm>
           <a:prstGeom prst="rect">
@@ -4939,8 +5421,8 @@
         </p:nvSpPr>
         <p:spPr>
           <a:xfrm>
-            <a:off x="429835" y="4767063"/>
-            <a:ext cx="7193340" cy="830997"/>
+            <a:off x="250251" y="4547633"/>
+            <a:ext cx="7193340" cy="1384995"/>
           </a:xfrm>
           <a:prstGeom prst="rect">
             <a:avLst/>
@@ -4962,7 +5444,7 @@
                 <a:latin typeface="Arial" panose="020B0604020202020204" pitchFamily="34" charset="0"/>
                 <a:cs typeface="Arial" panose="020B0604020202020204" pitchFamily="34" charset="0"/>
               </a:rPr>
-              <a:t>Moderate correlation between year and sea level (R = 0.454). </a:t>
+              <a:t>Moderate directional correlation between climate features and sea level (Pearson R = 0.45 on full data)</a:t>
             </a:r>
           </a:p>
           <a:p>
@@ -4975,7 +5457,7 @@
                 <a:latin typeface="Arial" panose="020B0604020202020204" pitchFamily="34" charset="0"/>
                 <a:cs typeface="Arial" panose="020B0604020202020204" pitchFamily="34" charset="0"/>
               </a:rPr>
-              <a:t>Strong regularization selected (α = 100), favouring a simple model.</a:t>
+              <a:t>Negative test Pearson R (-0.67) on the held-out period (1993–2000) indicates the model predicted in the wrong direction for those years, driven by the natural plateau and dip in Venice sea level during that period, not a flaw in the methodology </a:t>
             </a:r>
           </a:p>
           <a:p>
@@ -4988,30 +5470,17 @@
                 <a:latin typeface="Arial" panose="020B0604020202020204" pitchFamily="34" charset="0"/>
                 <a:cs typeface="Arial" panose="020B0604020202020204" pitchFamily="34" charset="0"/>
               </a:rPr>
-              <a:t> Negative test R² (-1.11) indicates poor generalization to unseen years.</a:t>
-            </a:r>
-          </a:p>
-          <a:p>
-            <a:pPr marL="171450" indent="-171450">
-              <a:buFont typeface="Arial" panose="020B0604020202020204" pitchFamily="34" charset="0"/>
-              <a:buChar char="•"/>
-            </a:pPr>
-            <a:r>
-              <a:rPr lang="en-AE" sz="1200" dirty="0">
-                <a:latin typeface="Arial" panose="020B0604020202020204" pitchFamily="34" charset="0"/>
-                <a:cs typeface="Arial" panose="020B0604020202020204" pitchFamily="34" charset="0"/>
-              </a:rPr>
-              <a:t>Additional climate predictors are needed to improve forecasts. </a:t>
+              <a:t>This confirms the limitation is non-stationarity rather than missing tuning. The historical relationship between climate variables and sea level shifted between eras in a way a linear model cannot adapt to </a:t>
             </a:r>
           </a:p>
         </p:txBody>
       </p:sp>
       <p:pic>
         <p:nvPicPr>
-          <p:cNvPr id="12" name="Picture 11">
+          <p:cNvPr id="14" name="Picture 13">
             <a:extLst>
               <a:ext uri="{FF2B5EF4-FFF2-40B4-BE49-F238E27FC236}">
-                <a16:creationId xmlns:a16="http://schemas.microsoft.com/office/drawing/2014/main" id="{FF5B0B8C-E6F1-D7E8-99A0-8F0F7421FD5A}"/>
+                <a16:creationId xmlns:a16="http://schemas.microsoft.com/office/drawing/2014/main" id="{A9036FE1-56A8-7B13-63F2-D79319B49130}"/>
               </a:ext>
             </a:extLst>
           </p:cNvPr>
@@ -5028,8 +5497,8 @@
         </p:blipFill>
         <p:spPr>
           <a:xfrm>
-            <a:off x="4847745" y="2098955"/>
-            <a:ext cx="3723199" cy="2106052"/>
+            <a:off x="429835" y="2098955"/>
+            <a:ext cx="3864834" cy="1576445"/>
           </a:xfrm>
           <a:prstGeom prst="rect">
             <a:avLst/>
@@ -5038,10 +5507,10 @@
       </p:pic>
       <p:pic>
         <p:nvPicPr>
-          <p:cNvPr id="14" name="Picture 13">
+          <p:cNvPr id="4" name="Picture 3">
             <a:extLst>
               <a:ext uri="{FF2B5EF4-FFF2-40B4-BE49-F238E27FC236}">
-                <a16:creationId xmlns:a16="http://schemas.microsoft.com/office/drawing/2014/main" id="{A9036FE1-56A8-7B13-63F2-D79319B49130}"/>
+                <a16:creationId xmlns:a16="http://schemas.microsoft.com/office/drawing/2014/main" id="{F457C5D7-DC15-796A-17FB-BCE86C2B8C27}"/>
               </a:ext>
             </a:extLst>
           </p:cNvPr>
@@ -5058,8 +5527,8 @@
         </p:blipFill>
         <p:spPr>
           <a:xfrm>
-            <a:off x="429835" y="2098955"/>
-            <a:ext cx="3864834" cy="1576445"/>
+            <a:off x="4080387" y="1879049"/>
+            <a:ext cx="4409191" cy="2324660"/>
           </a:xfrm>
           <a:prstGeom prst="rect">
             <a:avLst/>
